--- a/content/W02/D4/slides/C2_W02_D04_half1_STUDENT.pptx
+++ b/content/W02/D4/slides/C2_W02_D04_half1_STUDENT.pptx
@@ -5125,14 +5125,14 @@
       </p:sp>
       <p:pic>
         <p:nvPicPr>
-          <p:cNvPr id="6" name="Picture 5" descr="d29e2e96ef0afd4f.png"/>
+          <p:cNvPr id="6" name="Picture 5" descr="c1a00bf58a9e78a8.png"/>
           <p:cNvPicPr>
             <a:picLocks noChangeAspect="1"/>
           </p:cNvPicPr>
           <p:nvPr/>
         </p:nvPicPr>
         <p:blipFill>
-          <a:blip r:embed="rId2"/>
+          <a:blip r:embed="rId3"/>
           <a:stretch>
             <a:fillRect/>
           </a:stretch>
@@ -6155,14 +6155,14 @@
       </p:sp>
       <p:pic>
         <p:nvPicPr>
-          <p:cNvPr id="7" name="Picture 6" descr="2fd9520de57ff431.png"/>
+          <p:cNvPr id="7" name="Picture 6" descr="01b83aaf30d90caa.png"/>
           <p:cNvPicPr>
             <a:picLocks noChangeAspect="1"/>
           </p:cNvPicPr>
           <p:nvPr/>
         </p:nvPicPr>
         <p:blipFill>
-          <a:blip r:embed="rId2"/>
+          <a:blip r:embed="rId3"/>
           <a:stretch>
             <a:fillRect/>
           </a:stretch>
@@ -7173,14 +7173,14 @@
       </p:sp>
       <p:pic>
         <p:nvPicPr>
-          <p:cNvPr id="6" name="Picture 5" descr="4e2231e5d38b3280.png"/>
+          <p:cNvPr id="6" name="Picture 5" descr="0a572625a8118c92.png"/>
           <p:cNvPicPr>
             <a:picLocks noChangeAspect="1"/>
           </p:cNvPicPr>
           <p:nvPr/>
         </p:nvPicPr>
         <p:blipFill>
-          <a:blip r:embed="rId2"/>
+          <a:blip r:embed="rId3"/>
           <a:stretch>
             <a:fillRect/>
           </a:stretch>
@@ -7503,14 +7503,14 @@
       </p:sp>
       <p:pic>
         <p:nvPicPr>
-          <p:cNvPr id="6" name="Picture 5" descr="a40ef9c0164fc09f.png"/>
+          <p:cNvPr id="6" name="Picture 5" descr="490f4d54d177088e.png"/>
           <p:cNvPicPr>
             <a:picLocks noChangeAspect="1"/>
           </p:cNvPicPr>
           <p:nvPr/>
         </p:nvPicPr>
         <p:blipFill>
-          <a:blip r:embed="rId2"/>
+          <a:blip r:embed="rId3"/>
           <a:stretch>
             <a:fillRect/>
           </a:stretch>
@@ -10807,14 +10807,14 @@
       </p:sp>
       <p:pic>
         <p:nvPicPr>
-          <p:cNvPr id="6" name="Picture 5" descr="34f7803f84c4450a.png"/>
+          <p:cNvPr id="6" name="Picture 5" descr="73e39374c9ebdef3.png"/>
           <p:cNvPicPr>
             <a:picLocks noChangeAspect="1"/>
           </p:cNvPicPr>
           <p:nvPr/>
         </p:nvPicPr>
         <p:blipFill>
-          <a:blip r:embed="rId2"/>
+          <a:blip r:embed="rId3"/>
           <a:stretch>
             <a:fillRect/>
           </a:stretch>

--- a/content/W02/D4/slides/C2_W02_D04_half1_STUDENT.pptx
+++ b/content/W02/D4/slides/C2_W02_D04_half1_STUDENT.pptx
@@ -2194,12 +2194,12 @@
           <a:lstStyle/>
           <a:p>
             <a:r>
-              <a:t>LIVE, 4 minutes. This MergeError is not the two-minute kind of error: it is the check that</a:t>
-            </a:r>
-          </a:p>
-          <a:p>
-            <a:r>
-              <a:t>catches the trap, so it gets the time. Read the last line aloud: which side, which promise.</a:t>
+              <a:t>LIVE, 4 minutes. This MergeError is the check that catches the trap, so it gets the time, unlike the two-minute</a:t>
+            </a:r>
+          </a:p>
+          <a:p>
+            <a:r>
+              <a:t>runtime errors. Read the last line aloud: which side, which promise.</a:t>
             </a:r>
           </a:p>
           <a:p>

--- a/content/W02/D4/slides/C2_W02_D04_half1_STUDENT.pptx
+++ b/content/W02/D4/slides/C2_W02_D04_half1_STUDENT.pptx
@@ -17577,7 +17577,7 @@
                 </a:solidFill>
                 <a:latin typeface="Calibri"/>
               </a:rPr>
-              <a:t>Week 2 Day 4: the customer table Marketing refreshes every Monday</a:t>
+              <a:t>Week 2, Day 4. The customer table Marketing refreshes every Monday</a:t>
             </a:r>
           </a:p>
         </p:txBody>
@@ -21383,7 +21383,7 @@
                 </a:solidFill>
                 <a:latin typeface="Calibri"/>
               </a:rPr>
-              <a:t>Week 2 Day 4: the customer table Marketing refreshes every Monday</a:t>
+              <a:t>Week 2, Day 4. The customer table Marketing refreshes every Monday</a:t>
             </a:r>
           </a:p>
         </p:txBody>
@@ -31619,7 +31619,7 @@
         </p:nvSpPr>
         <p:spPr>
           <a:xfrm>
-            <a:off x="530352" y="1956816"/>
+            <a:off x="530352" y="1863598"/>
             <a:ext cx="11130991" cy="1719580"/>
           </a:xfrm>
           <a:prstGeom prst="roundRect">
@@ -31671,7 +31671,7 @@
         </p:nvSpPr>
         <p:spPr>
           <a:xfrm>
-            <a:off x="713232" y="2084832"/>
+            <a:off x="713232" y="1991614"/>
             <a:ext cx="91440" cy="91440"/>
           </a:xfrm>
           <a:prstGeom prst="ellipse">
@@ -31715,7 +31715,7 @@
         </p:nvSpPr>
         <p:spPr>
           <a:xfrm>
-            <a:off x="868680" y="2084832"/>
+            <a:off x="868680" y="1991614"/>
             <a:ext cx="91440" cy="91440"/>
           </a:xfrm>
           <a:prstGeom prst="ellipse">
@@ -31759,7 +31759,7 @@
         </p:nvSpPr>
         <p:spPr>
           <a:xfrm>
-            <a:off x="1024128" y="2084832"/>
+            <a:off x="1024128" y="1991614"/>
             <a:ext cx="91440" cy="91440"/>
           </a:xfrm>
           <a:prstGeom prst="ellipse">
@@ -31803,7 +31803,7 @@
         </p:nvSpPr>
         <p:spPr>
           <a:xfrm>
-            <a:off x="804671" y="2286000"/>
+            <a:off x="804671" y="2192782"/>
             <a:ext cx="10673791" cy="1317244"/>
           </a:xfrm>
           <a:prstGeom prst="rect">
@@ -31906,7 +31906,7 @@
         </p:nvSpPr>
         <p:spPr>
           <a:xfrm>
-            <a:off x="530352" y="3840988"/>
+            <a:off x="530352" y="3747770"/>
             <a:ext cx="5428335" cy="698500"/>
           </a:xfrm>
           <a:prstGeom prst="rect">
@@ -31941,7 +31941,7 @@
         </p:nvSpPr>
         <p:spPr>
           <a:xfrm>
-            <a:off x="530352" y="4576064"/>
+            <a:off x="530352" y="4482846"/>
             <a:ext cx="5428335" cy="168656"/>
           </a:xfrm>
           <a:prstGeom prst="rect">
@@ -31976,7 +31976,7 @@
         </p:nvSpPr>
         <p:spPr>
           <a:xfrm>
-            <a:off x="530352" y="4777232"/>
+            <a:off x="530352" y="4684014"/>
             <a:ext cx="5428335" cy="193421"/>
           </a:xfrm>
           <a:prstGeom prst="rect">
@@ -32011,7 +32011,7 @@
         </p:nvSpPr>
         <p:spPr>
           <a:xfrm>
-            <a:off x="530352" y="5029708"/>
+            <a:off x="530352" y="4936490"/>
             <a:ext cx="5428335" cy="10972"/>
           </a:xfrm>
           <a:prstGeom prst="rect">
@@ -32055,7 +32055,7 @@
         </p:nvSpPr>
         <p:spPr>
           <a:xfrm>
-            <a:off x="6233007" y="3840988"/>
+            <a:off x="6233007" y="3747770"/>
             <a:ext cx="5428335" cy="698500"/>
           </a:xfrm>
           <a:prstGeom prst="rect">
@@ -32090,7 +32090,7 @@
         </p:nvSpPr>
         <p:spPr>
           <a:xfrm>
-            <a:off x="6233007" y="4576064"/>
+            <a:off x="6233007" y="4482846"/>
             <a:ext cx="5428335" cy="168656"/>
           </a:xfrm>
           <a:prstGeom prst="rect">
@@ -32125,7 +32125,7 @@
         </p:nvSpPr>
         <p:spPr>
           <a:xfrm>
-            <a:off x="6233007" y="4777232"/>
+            <a:off x="6233007" y="4684014"/>
             <a:ext cx="5428335" cy="193421"/>
           </a:xfrm>
           <a:prstGeom prst="rect">
@@ -32160,7 +32160,7 @@
         </p:nvSpPr>
         <p:spPr>
           <a:xfrm>
-            <a:off x="6233007" y="5029708"/>
+            <a:off x="6233007" y="4936490"/>
             <a:ext cx="5428335" cy="10972"/>
           </a:xfrm>
           <a:prstGeom prst="rect">
@@ -32198,7 +32198,144 @@
       </p:sp>
       <p:sp>
         <p:nvSpPr>
-          <p:cNvPr id="22" name="Oval 21"/>
+          <p:cNvPr id="22" name="Rounded Rectangle 21"/>
+          <p:cNvSpPr/>
+          <p:nvPr/>
+        </p:nvSpPr>
+        <p:spPr>
+          <a:xfrm>
+            <a:off x="530352" y="5210810"/>
+            <a:ext cx="11130991" cy="807720"/>
+          </a:xfrm>
+          <a:prstGeom prst="roundRect">
+            <a:avLst>
+              <a:gd name="adj" fmla="val 8000"/>
+            </a:avLst>
+          </a:prstGeom>
+          <a:solidFill>
+            <a:srgbClr val="F7F5FD"/>
+          </a:solidFill>
+          <a:ln w="9525">
+            <a:solidFill>
+              <a:srgbClr val="E4E1F1"/>
+            </a:solidFill>
+          </a:ln>
+          <a:effectLst/>
+        </p:spPr>
+        <p:style>
+          <a:lnRef idx="1">
+            <a:schemeClr val="accent1"/>
+          </a:lnRef>
+          <a:fillRef idx="3">
+            <a:schemeClr val="accent1"/>
+          </a:fillRef>
+          <a:effectRef idx="2">
+            <a:schemeClr val="accent1"/>
+          </a:effectRef>
+          <a:fontRef idx="minor">
+            <a:schemeClr val="lt1"/>
+          </a:fontRef>
+        </p:style>
+        <p:txBody>
+          <a:bodyPr rtlCol="0" anchor="ctr" wrap="square"/>
+          <a:lstStyle/>
+          <a:p>
+            <a:pPr algn="ctr"/>
+          </a:p>
+        </p:txBody>
+      </p:sp>
+      <p:sp>
+        <p:nvSpPr>
+          <p:cNvPr id="23" name="Rounded Rectangle 22"/>
+          <p:cNvSpPr/>
+          <p:nvPr/>
+        </p:nvSpPr>
+        <p:spPr>
+          <a:xfrm>
+            <a:off x="676656" y="5338826"/>
+            <a:ext cx="45720" cy="551688"/>
+          </a:xfrm>
+          <a:prstGeom prst="roundRect">
+            <a:avLst>
+              <a:gd name="adj" fmla="val 50000"/>
+            </a:avLst>
+          </a:prstGeom>
+          <a:solidFill>
+            <a:srgbClr val="5B3FD6"/>
+          </a:solidFill>
+          <a:ln>
+            <a:noFill/>
+          </a:ln>
+          <a:effectLst/>
+        </p:spPr>
+        <p:style>
+          <a:lnRef idx="1">
+            <a:schemeClr val="accent1"/>
+          </a:lnRef>
+          <a:fillRef idx="3">
+            <a:schemeClr val="accent1"/>
+          </a:fillRef>
+          <a:effectRef idx="2">
+            <a:schemeClr val="accent1"/>
+          </a:effectRef>
+          <a:fontRef idx="minor">
+            <a:schemeClr val="lt1"/>
+          </a:fontRef>
+        </p:style>
+        <p:txBody>
+          <a:bodyPr rtlCol="0" anchor="ctr" wrap="square"/>
+          <a:lstStyle/>
+          <a:p>
+            <a:pPr algn="ctr"/>
+          </a:p>
+        </p:txBody>
+      </p:sp>
+      <p:sp>
+        <p:nvSpPr>
+          <p:cNvPr id="24" name="TextBox 23"/>
+          <p:cNvSpPr txBox="1"/>
+          <p:nvPr/>
+        </p:nvSpPr>
+        <p:spPr>
+          <a:xfrm>
+            <a:off x="877824" y="5329682"/>
+            <a:ext cx="10564063" cy="624840"/>
+          </a:xfrm>
+          <a:prstGeom prst="rect">
+            <a:avLst/>
+          </a:prstGeom>
+          <a:noFill/>
+        </p:spPr>
+        <p:txBody>
+          <a:bodyPr wrap="square" anchor="ctr" lIns="0" rIns="0" tIns="0" bIns="0">
+            <a:spAutoFit/>
+          </a:bodyPr>
+          <a:lstStyle/>
+          <a:p>
+            <a:r>
+              <a:rPr sz="1500" b="1">
+                <a:solidFill>
+                  <a:srgbClr val="5B3FD6"/>
+                </a:solidFill>
+                <a:latin typeface="Calibri"/>
+              </a:rPr>
+              <a:t>The decision it misleads. </a:t>
+            </a:r>
+            <a:r>
+              <a:rPr sz="1500" b="0" i="0">
+                <a:solidFill>
+                  <a:srgbClr val="1A1440"/>
+                </a:solidFill>
+                <a:latin typeface="Calibri"/>
+              </a:rPr>
+              <a:t>A sale that seems to turn every customer it reached into a buyer goes into next quarter's plan as the lever that always works, and nobody asks whom it reached and lost.</a:t>
+            </a:r>
+          </a:p>
+        </p:txBody>
+      </p:sp>
+      <p:sp>
+        <p:nvSpPr>
+          <p:cNvPr id="25" name="Oval 24"/>
           <p:cNvSpPr/>
           <p:nvPr/>
         </p:nvSpPr>
@@ -32242,7 +32379,7 @@
       </p:sp>
       <p:sp>
         <p:nvSpPr>
-          <p:cNvPr id="23" name="TextBox 22"/>
+          <p:cNvPr id="26" name="TextBox 25"/>
           <p:cNvSpPr txBox="1"/>
           <p:nvPr/>
         </p:nvSpPr>
@@ -32277,7 +32414,7 @@
       </p:sp>
       <p:sp>
         <p:nvSpPr>
-          <p:cNvPr id="24" name="Oval 23"/>
+          <p:cNvPr id="27" name="Oval 26"/>
           <p:cNvSpPr/>
           <p:nvPr/>
         </p:nvSpPr>
@@ -32321,7 +32458,7 @@
       </p:sp>
       <p:sp>
         <p:nvSpPr>
-          <p:cNvPr id="25" name="TextBox 24"/>
+          <p:cNvPr id="28" name="TextBox 27"/>
           <p:cNvSpPr txBox="1"/>
           <p:nvPr/>
         </p:nvSpPr>
@@ -32356,7 +32493,7 @@
       </p:sp>
       <p:sp>
         <p:nvSpPr>
-          <p:cNvPr id="26" name="Oval 25"/>
+          <p:cNvPr id="29" name="Oval 28"/>
           <p:cNvSpPr/>
           <p:nvPr/>
         </p:nvSpPr>
@@ -32400,7 +32537,7 @@
       </p:sp>
       <p:sp>
         <p:nvSpPr>
-          <p:cNvPr id="27" name="TextBox 26"/>
+          <p:cNvPr id="30" name="TextBox 29"/>
           <p:cNvSpPr txBox="1"/>
           <p:nvPr/>
         </p:nvSpPr>
@@ -32435,7 +32572,7 @@
       </p:sp>
       <p:sp>
         <p:nvSpPr>
-          <p:cNvPr id="28" name="Oval 27"/>
+          <p:cNvPr id="31" name="Oval 30"/>
           <p:cNvSpPr/>
           <p:nvPr/>
         </p:nvSpPr>
@@ -32479,7 +32616,7 @@
       </p:sp>
       <p:sp>
         <p:nvSpPr>
-          <p:cNvPr id="29" name="TextBox 28"/>
+          <p:cNvPr id="32" name="TextBox 31"/>
           <p:cNvSpPr txBox="1"/>
           <p:nvPr/>
         </p:nvSpPr>
@@ -32514,7 +32651,7 @@
       </p:sp>
       <p:sp>
         <p:nvSpPr>
-          <p:cNvPr id="30" name="TextBox 29"/>
+          <p:cNvPr id="33" name="TextBox 32"/>
           <p:cNvSpPr txBox="1"/>
           <p:nvPr/>
         </p:nvSpPr>
@@ -35748,7 +35885,7 @@
                 </a:solidFill>
                 <a:latin typeface="Calibri"/>
               </a:rPr>
-              <a:t>Week 2 Day 4: the customer table Marketing refreshes every Monday</a:t>
+              <a:t>Week 2, Day 4. The customer table Marketing refreshes every Monday</a:t>
             </a:r>
           </a:p>
         </p:txBody>
@@ -39617,7 +39754,7 @@
                 </a:solidFill>
                 <a:latin typeface="Calibri"/>
               </a:rPr>
-              <a:t>Rs 4,12,019 to Rs 3,37,266</a:t>
+              <a:t>Rs 4,12,019 to Rs 3,37,267</a:t>
             </a:r>
           </a:p>
         </p:txBody>
@@ -53163,7 +53300,7 @@
                 </a:solidFill>
                 <a:latin typeface="Calibri"/>
               </a:rPr>
-              <a:t>Week 2 Day 4: the customer table Marketing refreshes every Monday</a:t>
+              <a:t>Week 2, Day 4. The customer table Marketing refreshes every Monday</a:t>
             </a:r>
           </a:p>
         </p:txBody>
